--- a/LabHSE - STOGIT.pptx
+++ b/LabHSE - STOGIT.pptx
@@ -26247,7 +26247,7 @@
                 </a:solidFill>
                 <a:latin typeface="DejaVu Sans"/>
               </a:rPr>
-              <a:t>La Cultura HSE - valore aggregato: 74.74/100</a:t>
+              <a:t>La Cultura HSE - valore aggregato: 78.25/100</a:t>
             </a:r>
           </a:p>
         </p:txBody>
